--- a/topic09-menus-and-persistence/unit-1/talk-1-loop-recap/a-loops.pptx
+++ b/topic09-menus-and-persistence/unit-1/talk-1-loop-recap/a-loops.pptx
@@ -234,7 +234,7 @@
           <a:p>
             <a:fld id="{56BC3C30-7F3D-4B20-9974-47C57B22CA6E}" type="datetimeFigureOut">
               <a:rPr lang="en-IE" smtClean="0"/>
-              <a:t>11/11/2025</a:t>
+              <a:t>12/11/2025</a:t>
             </a:fld>
             <a:endParaRPr lang="en-IE"/>
           </a:p>
@@ -1198,7 +1198,7 @@
             <a:fld id="{1D8BD707-D9CF-40AE-B4C6-C98DA3205C09}" type="datetimeFigureOut">
               <a:rPr lang="en-US" smtClean="0"/>
               <a:pPr/>
-              <a:t>11/11/25</a:t>
+              <a:t>11/12/25</a:t>
             </a:fld>
             <a:endParaRPr lang="en-US"/>
           </a:p>
@@ -1370,7 +1370,7 @@
             <a:fld id="{1D8BD707-D9CF-40AE-B4C6-C98DA3205C09}" type="datetimeFigureOut">
               <a:rPr lang="en-US" smtClean="0"/>
               <a:pPr/>
-              <a:t>11/11/25</a:t>
+              <a:t>11/12/25</a:t>
             </a:fld>
             <a:endParaRPr lang="en-US"/>
           </a:p>
@@ -1552,7 +1552,7 @@
             <a:fld id="{1D8BD707-D9CF-40AE-B4C6-C98DA3205C09}" type="datetimeFigureOut">
               <a:rPr lang="en-US" smtClean="0"/>
               <a:pPr/>
-              <a:t>11/11/25</a:t>
+              <a:t>11/12/25</a:t>
             </a:fld>
             <a:endParaRPr lang="en-US"/>
           </a:p>
@@ -2191,7 +2191,7 @@
             <a:fld id="{1D8BD707-D9CF-40AE-B4C6-C98DA3205C09}" type="datetimeFigureOut">
               <a:rPr lang="en-US" smtClean="0"/>
               <a:pPr/>
-              <a:t>11/11/25</a:t>
+              <a:t>11/12/25</a:t>
             </a:fld>
             <a:endParaRPr lang="en-US"/>
           </a:p>
@@ -2741,7 +2741,7 @@
             <a:fld id="{1D8BD707-D9CF-40AE-B4C6-C98DA3205C09}" type="datetimeFigureOut">
               <a:rPr lang="en-US" smtClean="0"/>
               <a:pPr/>
-              <a:t>11/11/25</a:t>
+              <a:t>11/12/25</a:t>
             </a:fld>
             <a:endParaRPr lang="en-US"/>
           </a:p>
@@ -3042,7 +3042,7 @@
             <a:fld id="{1D8BD707-D9CF-40AE-B4C6-C98DA3205C09}" type="datetimeFigureOut">
               <a:rPr lang="en-US" smtClean="0"/>
               <a:pPr/>
-              <a:t>11/11/25</a:t>
+              <a:t>11/12/25</a:t>
             </a:fld>
             <a:endParaRPr lang="en-US"/>
           </a:p>
@@ -3754,7 +3754,7 @@
             <a:fld id="{1D8BD707-D9CF-40AE-B4C6-C98DA3205C09}" type="datetimeFigureOut">
               <a:rPr lang="en-US" smtClean="0"/>
               <a:pPr/>
-              <a:t>11/11/25</a:t>
+              <a:t>11/12/25</a:t>
             </a:fld>
             <a:endParaRPr lang="en-US"/>
           </a:p>
@@ -4125,7 +4125,7 @@
             <a:fld id="{1D8BD707-D9CF-40AE-B4C6-C98DA3205C09}" type="datetimeFigureOut">
               <a:rPr lang="en-US" smtClean="0"/>
               <a:pPr/>
-              <a:t>11/11/25</a:t>
+              <a:t>11/12/25</a:t>
             </a:fld>
             <a:endParaRPr lang="en-US"/>
           </a:p>
@@ -4503,7 +4503,7 @@
             <a:fld id="{1D8BD707-D9CF-40AE-B4C6-C98DA3205C09}" type="datetimeFigureOut">
               <a:rPr lang="en-US" smtClean="0"/>
               <a:pPr/>
-              <a:t>11/11/25</a:t>
+              <a:t>11/12/25</a:t>
             </a:fld>
             <a:endParaRPr lang="en-US"/>
           </a:p>
@@ -4782,7 +4782,7 @@
             <a:fld id="{1D8BD707-D9CF-40AE-B4C6-C98DA3205C09}" type="datetimeFigureOut">
               <a:rPr lang="en-US" smtClean="0"/>
               <a:pPr/>
-              <a:t>11/11/25</a:t>
+              <a:t>11/12/25</a:t>
             </a:fld>
             <a:endParaRPr lang="en-US"/>
           </a:p>
@@ -5041,7 +5041,7 @@
             <a:fld id="{1D8BD707-D9CF-40AE-B4C6-C98DA3205C09}" type="datetimeFigureOut">
               <a:rPr lang="en-US" smtClean="0"/>
               <a:pPr/>
-              <a:t>11/11/25</a:t>
+              <a:t>11/12/25</a:t>
             </a:fld>
             <a:endParaRPr lang="en-US"/>
           </a:p>
@@ -5261,7 +5261,7 @@
             <a:fld id="{1D8BD707-D9CF-40AE-B4C6-C98DA3205C09}" type="datetimeFigureOut">
               <a:rPr lang="en-US" smtClean="0"/>
               <a:pPr/>
-              <a:t>11/11/25</a:t>
+              <a:t>11/12/25</a:t>
             </a:fld>
             <a:endParaRPr lang="en-US"/>
           </a:p>
@@ -6293,6 +6293,36 @@
           <a:chExt cx="0" cy="0"/>
         </a:xfrm>
       </p:grpSpPr>
+      <p:pic>
+        <p:nvPicPr>
+          <p:cNvPr id="4" name="Picture 3">
+            <a:extLst>
+              <a:ext uri="{FF2B5EF4-FFF2-40B4-BE49-F238E27FC236}">
+                <a16:creationId xmlns:a16="http://schemas.microsoft.com/office/drawing/2014/main" id="{A6788E03-1953-60A1-76BA-CDC1F241FBB1}"/>
+              </a:ext>
+            </a:extLst>
+          </p:cNvPr>
+          <p:cNvPicPr>
+            <a:picLocks noChangeAspect="1"/>
+          </p:cNvPicPr>
+          <p:nvPr/>
+        </p:nvPicPr>
+        <p:blipFill>
+          <a:blip r:embed="rId2"/>
+          <a:stretch>
+            <a:fillRect/>
+          </a:stretch>
+        </p:blipFill>
+        <p:spPr>
+          <a:xfrm>
+            <a:off x="1267883" y="1854233"/>
+            <a:ext cx="7772400" cy="3911533"/>
+          </a:xfrm>
+          <a:prstGeom prst="rect">
+            <a:avLst/>
+          </a:prstGeom>
+        </p:spPr>
+      </p:pic>
       <p:sp>
         <p:nvSpPr>
           <p:cNvPr id="2" name="Title 1"/>
@@ -6320,53 +6350,6 @@
           </a:p>
         </p:txBody>
       </p:sp>
-      <p:pic>
-        <p:nvPicPr>
-          <p:cNvPr id="1026" name="Picture 2"/>
-          <p:cNvPicPr>
-            <a:picLocks noChangeAspect="1" noChangeArrowheads="1"/>
-          </p:cNvPicPr>
-          <p:nvPr/>
-        </p:nvPicPr>
-        <p:blipFill rotWithShape="1">
-          <a:blip r:embed="rId2">
-            <a:extLst>
-              <a:ext uri="{28A0092B-C50C-407E-A947-70E740481C1C}">
-                <a14:useLocalDpi xmlns:a14="http://schemas.microsoft.com/office/drawing/2010/main" val="0"/>
-              </a:ext>
-            </a:extLst>
-          </a:blip>
-          <a:srcRect l="29421" t="33608" r="37465" b="34746"/>
-          <a:stretch/>
-        </p:blipFill>
-        <p:spPr bwMode="auto">
-          <a:xfrm>
-            <a:off x="307349" y="1681450"/>
-            <a:ext cx="8783565" cy="4719350"/>
-          </a:xfrm>
-          <a:prstGeom prst="rect">
-            <a:avLst/>
-          </a:prstGeom>
-          <a:noFill/>
-          <a:ln w="9525">
-            <a:solidFill>
-              <a:schemeClr val="tx1"/>
-            </a:solidFill>
-            <a:miter lim="800000"/>
-            <a:headEnd/>
-            <a:tailEnd/>
-          </a:ln>
-          <a:extLst>
-            <a:ext uri="{909E8E84-426E-40DD-AFC4-6F175D3DCCD1}">
-              <a14:hiddenFill xmlns:a14="http://schemas.microsoft.com/office/drawing/2010/main">
-                <a:solidFill>
-                  <a:schemeClr val="accent1"/>
-                </a:solidFill>
-              </a14:hiddenFill>
-            </a:ext>
-          </a:extLst>
-        </p:spPr>
-      </p:pic>
       <p:sp>
         <p:nvSpPr>
           <p:cNvPr id="6" name="TextBox 5"/>
@@ -6493,9 +6476,9 @@
           <p:nvPr/>
         </p:nvCxnSpPr>
         <p:spPr>
-          <a:xfrm flipH="1">
-            <a:off x="3505200" y="4068455"/>
-            <a:ext cx="5848350" cy="0"/>
+          <a:xfrm flipH="1" flipV="1">
+            <a:off x="3276600" y="3809999"/>
+            <a:ext cx="6076950" cy="258456"/>
           </a:xfrm>
           <a:prstGeom prst="straightConnector1">
             <a:avLst/>
@@ -6529,8 +6512,8 @@
         </p:nvCxnSpPr>
         <p:spPr>
           <a:xfrm flipH="1" flipV="1">
-            <a:off x="4699132" y="5220586"/>
-            <a:ext cx="4597268" cy="342014"/>
+            <a:off x="3048000" y="4551088"/>
+            <a:ext cx="6248400" cy="1011512"/>
           </a:xfrm>
           <a:prstGeom prst="straightConnector1">
             <a:avLst/>
@@ -6589,6 +6572,36 @@
           </a:fontRef>
         </p:style>
       </p:cxnSp>
+      <p:pic>
+        <p:nvPicPr>
+          <p:cNvPr id="3" name="Picture 2">
+            <a:extLst>
+              <a:ext uri="{FF2B5EF4-FFF2-40B4-BE49-F238E27FC236}">
+                <a16:creationId xmlns:a16="http://schemas.microsoft.com/office/drawing/2014/main" id="{D150A085-AC0E-6FCF-D21F-674E49D5D064}"/>
+              </a:ext>
+            </a:extLst>
+          </p:cNvPr>
+          <p:cNvPicPr>
+            <a:picLocks noChangeAspect="1"/>
+          </p:cNvPicPr>
+          <p:nvPr/>
+        </p:nvPicPr>
+        <p:blipFill>
+          <a:blip r:embed="rId3"/>
+          <a:stretch>
+            <a:fillRect/>
+          </a:stretch>
+        </p:blipFill>
+        <p:spPr>
+          <a:xfrm>
+            <a:off x="7620000" y="294380"/>
+            <a:ext cx="4171950" cy="1263959"/>
+          </a:xfrm>
+          <a:prstGeom prst="rect">
+            <a:avLst/>
+          </a:prstGeom>
+        </p:spPr>
+      </p:pic>
     </p:spTree>
     <p:extLst>
       <p:ext uri="{BB962C8B-B14F-4D97-AF65-F5344CB8AC3E}">
@@ -6666,33 +6679,15 @@
                                   </p:childTnLst>
                                 </p:cTn>
                               </p:par>
-                            </p:childTnLst>
-                          </p:cTn>
-                        </p:par>
-                      </p:childTnLst>
-                    </p:cTn>
-                  </p:par>
-                  <p:par>
-                    <p:cTn id="8" fill="hold">
-                      <p:stCondLst>
-                        <p:cond delay="indefinite"/>
-                      </p:stCondLst>
-                      <p:childTnLst>
-                        <p:par>
-                          <p:cTn id="9" fill="hold">
-                            <p:stCondLst>
-                              <p:cond delay="0"/>
-                            </p:stCondLst>
-                            <p:childTnLst>
                               <p:par>
-                                <p:cTn id="10" presetID="10" presetClass="entr" presetSubtype="0" fill="hold" nodeType="clickEffect">
+                                <p:cTn id="8" presetID="10" presetClass="entr" presetSubtype="0" fill="hold" nodeType="withEffect">
                                   <p:stCondLst>
                                     <p:cond delay="0"/>
                                   </p:stCondLst>
                                   <p:childTnLst>
                                     <p:set>
                                       <p:cBhvr>
-                                        <p:cTn id="11" dur="1" fill="hold">
+                                        <p:cTn id="9" dur="1" fill="hold">
                                           <p:stCondLst>
                                             <p:cond delay="0"/>
                                           </p:stCondLst>
@@ -6710,7 +6705,7 @@
                                     </p:set>
                                     <p:animEffect transition="in" filter="fade">
                                       <p:cBhvr>
-                                        <p:cTn id="12" dur="500"/>
+                                        <p:cTn id="10" dur="500"/>
                                         <p:tgtEl>
                                           <p:spTgt spid="10"/>
                                         </p:tgtEl>
@@ -6726,26 +6721,26 @@
                     </p:cTn>
                   </p:par>
                   <p:par>
-                    <p:cTn id="13" fill="hold">
+                    <p:cTn id="11" fill="hold">
                       <p:stCondLst>
                         <p:cond delay="indefinite"/>
                       </p:stCondLst>
                       <p:childTnLst>
                         <p:par>
-                          <p:cTn id="14" fill="hold">
+                          <p:cTn id="12" fill="hold">
                             <p:stCondLst>
                               <p:cond delay="0"/>
                             </p:stCondLst>
                             <p:childTnLst>
                               <p:par>
-                                <p:cTn id="15" presetID="10" presetClass="entr" presetSubtype="0" fill="hold" grpId="0" nodeType="clickEffect">
+                                <p:cTn id="13" presetID="10" presetClass="entr" presetSubtype="0" fill="hold" grpId="0" nodeType="clickEffect">
                                   <p:stCondLst>
                                     <p:cond delay="0"/>
                                   </p:stCondLst>
                                   <p:childTnLst>
                                     <p:set>
                                       <p:cBhvr>
-                                        <p:cTn id="16" dur="1" fill="hold">
+                                        <p:cTn id="14" dur="1" fill="hold">
                                           <p:stCondLst>
                                             <p:cond delay="0"/>
                                           </p:stCondLst>
@@ -6763,7 +6758,7 @@
                                     </p:set>
                                     <p:animEffect transition="in" filter="fade">
                                       <p:cBhvr>
-                                        <p:cTn id="17" dur="500"/>
+                                        <p:cTn id="15" dur="500"/>
                                         <p:tgtEl>
                                           <p:spTgt spid="7"/>
                                         </p:tgtEl>
@@ -6772,33 +6767,15 @@
                                   </p:childTnLst>
                                 </p:cTn>
                               </p:par>
-                            </p:childTnLst>
-                          </p:cTn>
-                        </p:par>
-                      </p:childTnLst>
-                    </p:cTn>
-                  </p:par>
-                  <p:par>
-                    <p:cTn id="18" fill="hold">
-                      <p:stCondLst>
-                        <p:cond delay="indefinite"/>
-                      </p:stCondLst>
-                      <p:childTnLst>
-                        <p:par>
-                          <p:cTn id="19" fill="hold">
-                            <p:stCondLst>
-                              <p:cond delay="0"/>
-                            </p:stCondLst>
-                            <p:childTnLst>
                               <p:par>
-                                <p:cTn id="20" presetID="10" presetClass="entr" presetSubtype="0" fill="hold" nodeType="clickEffect">
+                                <p:cTn id="16" presetID="10" presetClass="entr" presetSubtype="0" fill="hold" nodeType="withEffect">
                                   <p:stCondLst>
                                     <p:cond delay="0"/>
                                   </p:stCondLst>
                                   <p:childTnLst>
                                     <p:set>
                                       <p:cBhvr>
-                                        <p:cTn id="21" dur="1" fill="hold">
+                                        <p:cTn id="17" dur="1" fill="hold">
                                           <p:stCondLst>
                                             <p:cond delay="0"/>
                                           </p:stCondLst>
@@ -6816,7 +6793,7 @@
                                     </p:set>
                                     <p:animEffect transition="in" filter="fade">
                                       <p:cBhvr>
-                                        <p:cTn id="22" dur="500"/>
+                                        <p:cTn id="18" dur="500"/>
                                         <p:tgtEl>
                                           <p:spTgt spid="12"/>
                                         </p:tgtEl>
@@ -6832,26 +6809,26 @@
                     </p:cTn>
                   </p:par>
                   <p:par>
-                    <p:cTn id="23" fill="hold">
+                    <p:cTn id="19" fill="hold">
                       <p:stCondLst>
                         <p:cond delay="indefinite"/>
                       </p:stCondLst>
                       <p:childTnLst>
                         <p:par>
-                          <p:cTn id="24" fill="hold">
+                          <p:cTn id="20" fill="hold">
                             <p:stCondLst>
                               <p:cond delay="0"/>
                             </p:stCondLst>
                             <p:childTnLst>
                               <p:par>
-                                <p:cTn id="25" presetID="10" presetClass="entr" presetSubtype="0" fill="hold" grpId="0" nodeType="clickEffect">
+                                <p:cTn id="21" presetID="10" presetClass="entr" presetSubtype="0" fill="hold" grpId="0" nodeType="clickEffect">
                                   <p:stCondLst>
                                     <p:cond delay="0"/>
                                   </p:stCondLst>
                                   <p:childTnLst>
                                     <p:set>
                                       <p:cBhvr>
-                                        <p:cTn id="26" dur="1" fill="hold">
+                                        <p:cTn id="22" dur="1" fill="hold">
                                           <p:stCondLst>
                                             <p:cond delay="0"/>
                                           </p:stCondLst>
@@ -6869,7 +6846,7 @@
                                     </p:set>
                                     <p:animEffect transition="in" filter="fade">
                                       <p:cBhvr>
-                                        <p:cTn id="27" dur="500"/>
+                                        <p:cTn id="23" dur="500"/>
                                         <p:tgtEl>
                                           <p:spTgt spid="8"/>
                                         </p:tgtEl>
@@ -6878,33 +6855,15 @@
                                   </p:childTnLst>
                                 </p:cTn>
                               </p:par>
-                            </p:childTnLst>
-                          </p:cTn>
-                        </p:par>
-                      </p:childTnLst>
-                    </p:cTn>
-                  </p:par>
-                  <p:par>
-                    <p:cTn id="28" fill="hold">
-                      <p:stCondLst>
-                        <p:cond delay="indefinite"/>
-                      </p:stCondLst>
-                      <p:childTnLst>
-                        <p:par>
-                          <p:cTn id="29" fill="hold">
-                            <p:stCondLst>
-                              <p:cond delay="0"/>
-                            </p:stCondLst>
-                            <p:childTnLst>
                               <p:par>
-                                <p:cTn id="30" presetID="10" presetClass="entr" presetSubtype="0" fill="hold" nodeType="clickEffect">
+                                <p:cTn id="24" presetID="10" presetClass="entr" presetSubtype="0" fill="hold" nodeType="withEffect">
                                   <p:stCondLst>
                                     <p:cond delay="0"/>
                                   </p:stCondLst>
                                   <p:childTnLst>
                                     <p:set>
                                       <p:cBhvr>
-                                        <p:cTn id="31" dur="1" fill="hold">
+                                        <p:cTn id="25" dur="1" fill="hold">
                                           <p:stCondLst>
                                             <p:cond delay="0"/>
                                           </p:stCondLst>
@@ -6922,7 +6881,7 @@
                                     </p:set>
                                     <p:animEffect transition="in" filter="fade">
                                       <p:cBhvr>
-                                        <p:cTn id="32" dur="500"/>
+                                        <p:cTn id="26" dur="500"/>
                                         <p:tgtEl>
                                           <p:spTgt spid="14"/>
                                         </p:tgtEl>
@@ -7102,51 +7061,113 @@
       </p:sp>
       <p:pic>
         <p:nvPicPr>
-          <p:cNvPr id="2050" name="Picture 2"/>
+          <p:cNvPr id="4" name="Picture 3">
+            <a:extLst>
+              <a:ext uri="{FF2B5EF4-FFF2-40B4-BE49-F238E27FC236}">
+                <a16:creationId xmlns:a16="http://schemas.microsoft.com/office/drawing/2014/main" id="{FD6002C8-EAA4-B1FA-EFF2-0B0778AC4C72}"/>
+              </a:ext>
+            </a:extLst>
+          </p:cNvPr>
           <p:cNvPicPr>
-            <a:picLocks noChangeAspect="1" noChangeArrowheads="1"/>
+            <a:picLocks noChangeAspect="1"/>
           </p:cNvPicPr>
           <p:nvPr/>
         </p:nvPicPr>
-        <p:blipFill rotWithShape="1">
-          <a:blip r:embed="rId2">
-            <a:extLst>
-              <a:ext uri="{28A0092B-C50C-407E-A947-70E740481C1C}">
-                <a14:useLocalDpi xmlns:a14="http://schemas.microsoft.com/office/drawing/2010/main" val="0"/>
-              </a:ext>
-            </a:extLst>
-          </a:blip>
-          <a:srcRect l="29660" t="28389" r="31866" b="35805"/>
-          <a:stretch/>
+        <p:blipFill>
+          <a:blip r:embed="rId2"/>
+          <a:stretch>
+            <a:fillRect/>
+          </a:stretch>
         </p:blipFill>
-        <p:spPr bwMode="auto">
+        <p:spPr>
           <a:xfrm>
-            <a:off x="1828801" y="1752600"/>
-            <a:ext cx="8592567" cy="4495800"/>
+            <a:off x="19050" y="1749156"/>
+            <a:ext cx="7772400" cy="4340024"/>
           </a:xfrm>
           <a:prstGeom prst="rect">
             <a:avLst/>
           </a:prstGeom>
-          <a:noFill/>
-          <a:ln w="9525">
-            <a:solidFill>
-              <a:schemeClr val="tx1"/>
-            </a:solidFill>
-            <a:miter lim="800000"/>
-            <a:headEnd/>
-            <a:tailEnd/>
-          </a:ln>
-          <a:extLst>
-            <a:ext uri="{909E8E84-426E-40DD-AFC4-6F175D3DCCD1}">
-              <a14:hiddenFill xmlns:a14="http://schemas.microsoft.com/office/drawing/2010/main">
-                <a:solidFill>
-                  <a:schemeClr val="accent1"/>
-                </a:solidFill>
-              </a14:hiddenFill>
-            </a:ext>
-          </a:extLst>
         </p:spPr>
       </p:pic>
+      <p:pic>
+        <p:nvPicPr>
+          <p:cNvPr id="5" name="Picture 4">
+            <a:extLst>
+              <a:ext uri="{FF2B5EF4-FFF2-40B4-BE49-F238E27FC236}">
+                <a16:creationId xmlns:a16="http://schemas.microsoft.com/office/drawing/2014/main" id="{60E22F1C-41EC-1C7C-E1DA-D4835C7E3CC3}"/>
+              </a:ext>
+            </a:extLst>
+          </p:cNvPr>
+          <p:cNvPicPr>
+            <a:picLocks noChangeAspect="1"/>
+          </p:cNvPicPr>
+          <p:nvPr/>
+        </p:nvPicPr>
+        <p:blipFill>
+          <a:blip r:embed="rId3"/>
+          <a:stretch>
+            <a:fillRect/>
+          </a:stretch>
+        </p:blipFill>
+        <p:spPr>
+          <a:xfrm>
+            <a:off x="9201150" y="3282949"/>
+            <a:ext cx="2971800" cy="1196975"/>
+          </a:xfrm>
+          <a:prstGeom prst="rect">
+            <a:avLst/>
+          </a:prstGeom>
+        </p:spPr>
+      </p:pic>
+      <p:sp>
+        <p:nvSpPr>
+          <p:cNvPr id="6" name="Right Arrow 5">
+            <a:extLst>
+              <a:ext uri="{FF2B5EF4-FFF2-40B4-BE49-F238E27FC236}">
+                <a16:creationId xmlns:a16="http://schemas.microsoft.com/office/drawing/2014/main" id="{6FD64605-CA3E-A07C-C3B1-91827ED4F1ED}"/>
+              </a:ext>
+            </a:extLst>
+          </p:cNvPr>
+          <p:cNvSpPr/>
+          <p:nvPr/>
+        </p:nvSpPr>
+        <p:spPr>
+          <a:xfrm>
+            <a:off x="6867525" y="3429000"/>
+            <a:ext cx="2362200" cy="679451"/>
+          </a:xfrm>
+          <a:prstGeom prst="rightArrow">
+            <a:avLst>
+              <a:gd name="adj1" fmla="val 50000"/>
+              <a:gd name="adj2" fmla="val 55841"/>
+            </a:avLst>
+          </a:prstGeom>
+        </p:spPr>
+        <p:style>
+          <a:lnRef idx="2">
+            <a:schemeClr val="accent1">
+              <a:shade val="15000"/>
+            </a:schemeClr>
+          </a:lnRef>
+          <a:fillRef idx="1">
+            <a:schemeClr val="accent1"/>
+          </a:fillRef>
+          <a:effectRef idx="0">
+            <a:schemeClr val="accent1"/>
+          </a:effectRef>
+          <a:fontRef idx="minor">
+            <a:schemeClr val="lt1"/>
+          </a:fontRef>
+        </p:style>
+        <p:txBody>
+          <a:bodyPr rtlCol="0" anchor="ctr"/>
+          <a:lstStyle/>
+          <a:p>
+            <a:pPr algn="ctr"/>
+            <a:endParaRPr lang="en-US"/>
+          </a:p>
+        </p:txBody>
+      </p:sp>
     </p:spTree>
     <p:extLst>
       <p:ext uri="{BB962C8B-B14F-4D97-AF65-F5344CB8AC3E}">
@@ -7157,6 +7178,203 @@
   <p:clrMapOvr>
     <a:masterClrMapping/>
   </p:clrMapOvr>
+  <p:timing>
+    <p:tnLst>
+      <p:par>
+        <p:cTn id="1" dur="indefinite" restart="never" nodeType="tmRoot">
+          <p:childTnLst>
+            <p:seq concurrent="1" nextAc="seek">
+              <p:cTn id="2" dur="indefinite" nodeType="mainSeq">
+                <p:childTnLst>
+                  <p:par>
+                    <p:cTn id="3" fill="hold">
+                      <p:stCondLst>
+                        <p:cond delay="indefinite"/>
+                      </p:stCondLst>
+                      <p:childTnLst>
+                        <p:par>
+                          <p:cTn id="4" fill="hold">
+                            <p:stCondLst>
+                              <p:cond delay="0"/>
+                            </p:stCondLst>
+                            <p:childTnLst>
+                              <p:par>
+                                <p:cTn id="5" presetID="2" presetClass="entr" presetSubtype="4" fill="hold" grpId="0" nodeType="clickEffect">
+                                  <p:stCondLst>
+                                    <p:cond delay="0"/>
+                                  </p:stCondLst>
+                                  <p:childTnLst>
+                                    <p:set>
+                                      <p:cBhvr>
+                                        <p:cTn id="6" dur="1" fill="hold">
+                                          <p:stCondLst>
+                                            <p:cond delay="0"/>
+                                          </p:stCondLst>
+                                        </p:cTn>
+                                        <p:tgtEl>
+                                          <p:spTgt spid="6"/>
+                                        </p:tgtEl>
+                                        <p:attrNameLst>
+                                          <p:attrName>style.visibility</p:attrName>
+                                        </p:attrNameLst>
+                                      </p:cBhvr>
+                                      <p:to>
+                                        <p:strVal val="visible"/>
+                                      </p:to>
+                                    </p:set>
+                                    <p:anim calcmode="lin" valueType="num">
+                                      <p:cBhvr additive="base">
+                                        <p:cTn id="7" dur="500" fill="hold"/>
+                                        <p:tgtEl>
+                                          <p:spTgt spid="6"/>
+                                        </p:tgtEl>
+                                        <p:attrNameLst>
+                                          <p:attrName>ppt_x</p:attrName>
+                                        </p:attrNameLst>
+                                      </p:cBhvr>
+                                      <p:tavLst>
+                                        <p:tav tm="0">
+                                          <p:val>
+                                            <p:strVal val="#ppt_x"/>
+                                          </p:val>
+                                        </p:tav>
+                                        <p:tav tm="100000">
+                                          <p:val>
+                                            <p:strVal val="#ppt_x"/>
+                                          </p:val>
+                                        </p:tav>
+                                      </p:tavLst>
+                                    </p:anim>
+                                    <p:anim calcmode="lin" valueType="num">
+                                      <p:cBhvr additive="base">
+                                        <p:cTn id="8" dur="500" fill="hold"/>
+                                        <p:tgtEl>
+                                          <p:spTgt spid="6"/>
+                                        </p:tgtEl>
+                                        <p:attrNameLst>
+                                          <p:attrName>ppt_y</p:attrName>
+                                        </p:attrNameLst>
+                                      </p:cBhvr>
+                                      <p:tavLst>
+                                        <p:tav tm="0">
+                                          <p:val>
+                                            <p:strVal val="1+#ppt_h/2"/>
+                                          </p:val>
+                                        </p:tav>
+                                        <p:tav tm="100000">
+                                          <p:val>
+                                            <p:strVal val="#ppt_y"/>
+                                          </p:val>
+                                        </p:tav>
+                                      </p:tavLst>
+                                    </p:anim>
+                                  </p:childTnLst>
+                                </p:cTn>
+                              </p:par>
+                              <p:par>
+                                <p:cTn id="9" presetID="2" presetClass="entr" presetSubtype="4" fill="hold" nodeType="withEffect">
+                                  <p:stCondLst>
+                                    <p:cond delay="0"/>
+                                  </p:stCondLst>
+                                  <p:childTnLst>
+                                    <p:set>
+                                      <p:cBhvr>
+                                        <p:cTn id="10" dur="1" fill="hold">
+                                          <p:stCondLst>
+                                            <p:cond delay="0"/>
+                                          </p:stCondLst>
+                                        </p:cTn>
+                                        <p:tgtEl>
+                                          <p:spTgt spid="5"/>
+                                        </p:tgtEl>
+                                        <p:attrNameLst>
+                                          <p:attrName>style.visibility</p:attrName>
+                                        </p:attrNameLst>
+                                      </p:cBhvr>
+                                      <p:to>
+                                        <p:strVal val="visible"/>
+                                      </p:to>
+                                    </p:set>
+                                    <p:anim calcmode="lin" valueType="num">
+                                      <p:cBhvr additive="base">
+                                        <p:cTn id="11" dur="500" fill="hold"/>
+                                        <p:tgtEl>
+                                          <p:spTgt spid="5"/>
+                                        </p:tgtEl>
+                                        <p:attrNameLst>
+                                          <p:attrName>ppt_x</p:attrName>
+                                        </p:attrNameLst>
+                                      </p:cBhvr>
+                                      <p:tavLst>
+                                        <p:tav tm="0">
+                                          <p:val>
+                                            <p:strVal val="#ppt_x"/>
+                                          </p:val>
+                                        </p:tav>
+                                        <p:tav tm="100000">
+                                          <p:val>
+                                            <p:strVal val="#ppt_x"/>
+                                          </p:val>
+                                        </p:tav>
+                                      </p:tavLst>
+                                    </p:anim>
+                                    <p:anim calcmode="lin" valueType="num">
+                                      <p:cBhvr additive="base">
+                                        <p:cTn id="12" dur="500" fill="hold"/>
+                                        <p:tgtEl>
+                                          <p:spTgt spid="5"/>
+                                        </p:tgtEl>
+                                        <p:attrNameLst>
+                                          <p:attrName>ppt_y</p:attrName>
+                                        </p:attrNameLst>
+                                      </p:cBhvr>
+                                      <p:tavLst>
+                                        <p:tav tm="0">
+                                          <p:val>
+                                            <p:strVal val="1+#ppt_h/2"/>
+                                          </p:val>
+                                        </p:tav>
+                                        <p:tav tm="100000">
+                                          <p:val>
+                                            <p:strVal val="#ppt_y"/>
+                                          </p:val>
+                                        </p:tav>
+                                      </p:tavLst>
+                                    </p:anim>
+                                  </p:childTnLst>
+                                </p:cTn>
+                              </p:par>
+                            </p:childTnLst>
+                          </p:cTn>
+                        </p:par>
+                      </p:childTnLst>
+                    </p:cTn>
+                  </p:par>
+                </p:childTnLst>
+              </p:cTn>
+              <p:prevCondLst>
+                <p:cond evt="onPrev" delay="0">
+                  <p:tgtEl>
+                    <p:sldTgt/>
+                  </p:tgtEl>
+                </p:cond>
+              </p:prevCondLst>
+              <p:nextCondLst>
+                <p:cond evt="onNext" delay="0">
+                  <p:tgtEl>
+                    <p:sldTgt/>
+                  </p:tgtEl>
+                </p:cond>
+              </p:nextCondLst>
+            </p:seq>
+          </p:childTnLst>
+        </p:cTn>
+      </p:par>
+    </p:tnLst>
+    <p:bldLst>
+      <p:bldP spid="6" grpId="0" animBg="1"/>
+    </p:bldLst>
+  </p:timing>
 </p:sld>
 </file>
 
@@ -7284,77 +7502,139 @@
           <a:chExt cx="0" cy="0"/>
         </a:xfrm>
       </p:grpSpPr>
+      <p:sp>
+        <p:nvSpPr>
+          <p:cNvPr id="5" name="Title 1"/>
+          <p:cNvSpPr>
+            <a:spLocks noGrp="1"/>
+          </p:cNvSpPr>
+          <p:nvPr>
+            <p:ph type="title"/>
+          </p:nvPr>
+        </p:nvSpPr>
+        <p:spPr>
+          <a:xfrm>
+            <a:off x="1981200" y="274638"/>
+            <a:ext cx="8229600" cy="1143000"/>
+          </a:xfrm>
+        </p:spPr>
+        <p:txBody>
+          <a:bodyPr/>
+          <a:lstStyle/>
+          <a:p>
+            <a:r>
+              <a:rPr lang="en-US" dirty="0"/>
+              <a:t>Solution – storing inputs</a:t>
+            </a:r>
+          </a:p>
+        </p:txBody>
+      </p:sp>
       <p:pic>
         <p:nvPicPr>
-          <p:cNvPr id="4098" name="Picture 2"/>
+          <p:cNvPr id="2" name="Picture 1">
+            <a:extLst>
+              <a:ext uri="{FF2B5EF4-FFF2-40B4-BE49-F238E27FC236}">
+                <a16:creationId xmlns:a16="http://schemas.microsoft.com/office/drawing/2014/main" id="{C0A09C31-1D0B-478E-64A1-D25B14B1A1A3}"/>
+              </a:ext>
+            </a:extLst>
+          </p:cNvPr>
           <p:cNvPicPr>
-            <a:picLocks noChangeAspect="1" noChangeArrowheads="1"/>
+            <a:picLocks noChangeAspect="1"/>
           </p:cNvPicPr>
           <p:nvPr/>
         </p:nvPicPr>
-        <p:blipFill rotWithShape="1">
-          <a:blip r:embed="rId2">
-            <a:extLst>
-              <a:ext uri="{28A0092B-C50C-407E-A947-70E740481C1C}">
-                <a14:useLocalDpi xmlns:a14="http://schemas.microsoft.com/office/drawing/2010/main" val="0"/>
-              </a:ext>
-            </a:extLst>
-          </a:blip>
-          <a:srcRect l="29660" t="15466" r="21265" b="34745"/>
-          <a:stretch/>
+        <p:blipFill>
+          <a:blip r:embed="rId2"/>
+          <a:stretch>
+            <a:fillRect/>
+          </a:stretch>
         </p:blipFill>
-        <p:spPr bwMode="auto">
+        <p:spPr>
           <a:xfrm>
-            <a:off x="1676400" y="1511424"/>
-            <a:ext cx="8839200" cy="5041777"/>
+            <a:off x="8915400" y="2971800"/>
+            <a:ext cx="3429000" cy="1813278"/>
           </a:xfrm>
           <a:prstGeom prst="rect">
             <a:avLst/>
           </a:prstGeom>
-          <a:noFill/>
-          <a:ln w="9525">
-            <a:solidFill>
-              <a:schemeClr val="tx1"/>
-            </a:solidFill>
-            <a:miter lim="800000"/>
-            <a:headEnd/>
-            <a:tailEnd/>
-          </a:ln>
-          <a:extLst>
-            <a:ext uri="{909E8E84-426E-40DD-AFC4-6F175D3DCCD1}">
-              <a14:hiddenFill xmlns:a14="http://schemas.microsoft.com/office/drawing/2010/main">
-                <a:solidFill>
-                  <a:schemeClr val="accent1"/>
-                </a:solidFill>
-              </a14:hiddenFill>
-            </a:ext>
-          </a:extLst>
         </p:spPr>
       </p:pic>
-      <p:sp>
-        <p:nvSpPr>
-          <p:cNvPr id="5" name="Title 1"/>
-          <p:cNvSpPr>
-            <a:spLocks noGrp="1"/>
-          </p:cNvSpPr>
-          <p:nvPr>
-            <p:ph type="title"/>
-          </p:nvPr>
-        </p:nvSpPr>
+      <p:pic>
+        <p:nvPicPr>
+          <p:cNvPr id="3" name="Picture 2">
+            <a:extLst>
+              <a:ext uri="{FF2B5EF4-FFF2-40B4-BE49-F238E27FC236}">
+                <a16:creationId xmlns:a16="http://schemas.microsoft.com/office/drawing/2014/main" id="{C26D70AD-A095-0CD5-C4A1-1DC714399AA3}"/>
+              </a:ext>
+            </a:extLst>
+          </p:cNvPr>
+          <p:cNvPicPr>
+            <a:picLocks noChangeAspect="1"/>
+          </p:cNvPicPr>
+          <p:nvPr/>
+        </p:nvPicPr>
+        <p:blipFill>
+          <a:blip r:embed="rId3"/>
+          <a:stretch>
+            <a:fillRect/>
+          </a:stretch>
+        </p:blipFill>
         <p:spPr>
           <a:xfrm>
-            <a:off x="1981200" y="274638"/>
-            <a:ext cx="8229600" cy="1143000"/>
-          </a:xfrm>
-        </p:spPr>
-        <p:txBody>
-          <a:bodyPr/>
+            <a:off x="33867" y="1417638"/>
+            <a:ext cx="7772400" cy="5418712"/>
+          </a:xfrm>
+          <a:prstGeom prst="rect">
+            <a:avLst/>
+          </a:prstGeom>
+        </p:spPr>
+      </p:pic>
+      <p:sp>
+        <p:nvSpPr>
+          <p:cNvPr id="4" name="Right Arrow 3">
+            <a:extLst>
+              <a:ext uri="{FF2B5EF4-FFF2-40B4-BE49-F238E27FC236}">
+                <a16:creationId xmlns:a16="http://schemas.microsoft.com/office/drawing/2014/main" id="{C88E4945-8C66-9B3F-B377-E7BA36CC9D00}"/>
+              </a:ext>
+            </a:extLst>
+          </p:cNvPr>
+          <p:cNvSpPr/>
+          <p:nvPr/>
+        </p:nvSpPr>
+        <p:spPr>
+          <a:xfrm>
+            <a:off x="7871629" y="3673239"/>
+            <a:ext cx="978408" cy="410400"/>
+          </a:xfrm>
+          <a:prstGeom prst="rightArrow">
+            <a:avLst>
+              <a:gd name="adj1" fmla="val 15059"/>
+              <a:gd name="adj2" fmla="val 50000"/>
+            </a:avLst>
+          </a:prstGeom>
+        </p:spPr>
+        <p:style>
+          <a:lnRef idx="2">
+            <a:schemeClr val="accent1">
+              <a:shade val="15000"/>
+            </a:schemeClr>
+          </a:lnRef>
+          <a:fillRef idx="1">
+            <a:schemeClr val="accent1"/>
+          </a:fillRef>
+          <a:effectRef idx="0">
+            <a:schemeClr val="accent1"/>
+          </a:effectRef>
+          <a:fontRef idx="minor">
+            <a:schemeClr val="lt1"/>
+          </a:fontRef>
+        </p:style>
+        <p:txBody>
+          <a:bodyPr rtlCol="0" anchor="ctr"/>
           <a:lstStyle/>
           <a:p>
-            <a:r>
-              <a:rPr lang="en-US" dirty="0"/>
-              <a:t>Solution – storing inputs</a:t>
-            </a:r>
+            <a:pPr algn="ctr"/>
+            <a:endParaRPr lang="en-US"/>
           </a:p>
         </p:txBody>
       </p:sp>
@@ -7368,6 +7648,203 @@
   <p:clrMapOvr>
     <a:masterClrMapping/>
   </p:clrMapOvr>
+  <p:timing>
+    <p:tnLst>
+      <p:par>
+        <p:cTn id="1" dur="indefinite" restart="never" nodeType="tmRoot">
+          <p:childTnLst>
+            <p:seq concurrent="1" nextAc="seek">
+              <p:cTn id="2" dur="indefinite" nodeType="mainSeq">
+                <p:childTnLst>
+                  <p:par>
+                    <p:cTn id="3" fill="hold">
+                      <p:stCondLst>
+                        <p:cond delay="indefinite"/>
+                      </p:stCondLst>
+                      <p:childTnLst>
+                        <p:par>
+                          <p:cTn id="4" fill="hold">
+                            <p:stCondLst>
+                              <p:cond delay="0"/>
+                            </p:stCondLst>
+                            <p:childTnLst>
+                              <p:par>
+                                <p:cTn id="5" presetID="2" presetClass="entr" presetSubtype="4" fill="hold" nodeType="clickEffect">
+                                  <p:stCondLst>
+                                    <p:cond delay="0"/>
+                                  </p:stCondLst>
+                                  <p:childTnLst>
+                                    <p:set>
+                                      <p:cBhvr>
+                                        <p:cTn id="6" dur="1" fill="hold">
+                                          <p:stCondLst>
+                                            <p:cond delay="0"/>
+                                          </p:stCondLst>
+                                        </p:cTn>
+                                        <p:tgtEl>
+                                          <p:spTgt spid="2"/>
+                                        </p:tgtEl>
+                                        <p:attrNameLst>
+                                          <p:attrName>style.visibility</p:attrName>
+                                        </p:attrNameLst>
+                                      </p:cBhvr>
+                                      <p:to>
+                                        <p:strVal val="visible"/>
+                                      </p:to>
+                                    </p:set>
+                                    <p:anim calcmode="lin" valueType="num">
+                                      <p:cBhvr additive="base">
+                                        <p:cTn id="7" dur="500" fill="hold"/>
+                                        <p:tgtEl>
+                                          <p:spTgt spid="2"/>
+                                        </p:tgtEl>
+                                        <p:attrNameLst>
+                                          <p:attrName>ppt_x</p:attrName>
+                                        </p:attrNameLst>
+                                      </p:cBhvr>
+                                      <p:tavLst>
+                                        <p:tav tm="0">
+                                          <p:val>
+                                            <p:strVal val="#ppt_x"/>
+                                          </p:val>
+                                        </p:tav>
+                                        <p:tav tm="100000">
+                                          <p:val>
+                                            <p:strVal val="#ppt_x"/>
+                                          </p:val>
+                                        </p:tav>
+                                      </p:tavLst>
+                                    </p:anim>
+                                    <p:anim calcmode="lin" valueType="num">
+                                      <p:cBhvr additive="base">
+                                        <p:cTn id="8" dur="500" fill="hold"/>
+                                        <p:tgtEl>
+                                          <p:spTgt spid="2"/>
+                                        </p:tgtEl>
+                                        <p:attrNameLst>
+                                          <p:attrName>ppt_y</p:attrName>
+                                        </p:attrNameLst>
+                                      </p:cBhvr>
+                                      <p:tavLst>
+                                        <p:tav tm="0">
+                                          <p:val>
+                                            <p:strVal val="1+#ppt_h/2"/>
+                                          </p:val>
+                                        </p:tav>
+                                        <p:tav tm="100000">
+                                          <p:val>
+                                            <p:strVal val="#ppt_y"/>
+                                          </p:val>
+                                        </p:tav>
+                                      </p:tavLst>
+                                    </p:anim>
+                                  </p:childTnLst>
+                                </p:cTn>
+                              </p:par>
+                              <p:par>
+                                <p:cTn id="9" presetID="2" presetClass="entr" presetSubtype="4" fill="hold" grpId="0" nodeType="withEffect">
+                                  <p:stCondLst>
+                                    <p:cond delay="0"/>
+                                  </p:stCondLst>
+                                  <p:childTnLst>
+                                    <p:set>
+                                      <p:cBhvr>
+                                        <p:cTn id="10" dur="1" fill="hold">
+                                          <p:stCondLst>
+                                            <p:cond delay="0"/>
+                                          </p:stCondLst>
+                                        </p:cTn>
+                                        <p:tgtEl>
+                                          <p:spTgt spid="4"/>
+                                        </p:tgtEl>
+                                        <p:attrNameLst>
+                                          <p:attrName>style.visibility</p:attrName>
+                                        </p:attrNameLst>
+                                      </p:cBhvr>
+                                      <p:to>
+                                        <p:strVal val="visible"/>
+                                      </p:to>
+                                    </p:set>
+                                    <p:anim calcmode="lin" valueType="num">
+                                      <p:cBhvr additive="base">
+                                        <p:cTn id="11" dur="500" fill="hold"/>
+                                        <p:tgtEl>
+                                          <p:spTgt spid="4"/>
+                                        </p:tgtEl>
+                                        <p:attrNameLst>
+                                          <p:attrName>ppt_x</p:attrName>
+                                        </p:attrNameLst>
+                                      </p:cBhvr>
+                                      <p:tavLst>
+                                        <p:tav tm="0">
+                                          <p:val>
+                                            <p:strVal val="#ppt_x"/>
+                                          </p:val>
+                                        </p:tav>
+                                        <p:tav tm="100000">
+                                          <p:val>
+                                            <p:strVal val="#ppt_x"/>
+                                          </p:val>
+                                        </p:tav>
+                                      </p:tavLst>
+                                    </p:anim>
+                                    <p:anim calcmode="lin" valueType="num">
+                                      <p:cBhvr additive="base">
+                                        <p:cTn id="12" dur="500" fill="hold"/>
+                                        <p:tgtEl>
+                                          <p:spTgt spid="4"/>
+                                        </p:tgtEl>
+                                        <p:attrNameLst>
+                                          <p:attrName>ppt_y</p:attrName>
+                                        </p:attrNameLst>
+                                      </p:cBhvr>
+                                      <p:tavLst>
+                                        <p:tav tm="0">
+                                          <p:val>
+                                            <p:strVal val="1+#ppt_h/2"/>
+                                          </p:val>
+                                        </p:tav>
+                                        <p:tav tm="100000">
+                                          <p:val>
+                                            <p:strVal val="#ppt_y"/>
+                                          </p:val>
+                                        </p:tav>
+                                      </p:tavLst>
+                                    </p:anim>
+                                  </p:childTnLst>
+                                </p:cTn>
+                              </p:par>
+                            </p:childTnLst>
+                          </p:cTn>
+                        </p:par>
+                      </p:childTnLst>
+                    </p:cTn>
+                  </p:par>
+                </p:childTnLst>
+              </p:cTn>
+              <p:prevCondLst>
+                <p:cond evt="onPrev" delay="0">
+                  <p:tgtEl>
+                    <p:sldTgt/>
+                  </p:tgtEl>
+                </p:cond>
+              </p:prevCondLst>
+              <p:nextCondLst>
+                <p:cond evt="onNext" delay="0">
+                  <p:tgtEl>
+                    <p:sldTgt/>
+                  </p:tgtEl>
+                </p:cond>
+              </p:nextCondLst>
+            </p:seq>
+          </p:childTnLst>
+        </p:cTn>
+      </p:par>
+    </p:tnLst>
+    <p:bldLst>
+      <p:bldP spid="4" grpId="0" animBg="1"/>
+    </p:bldLst>
+  </p:timing>
 </p:sld>
 </file>
 
@@ -9142,10 +9619,10 @@
       </p:grpSpPr>
       <p:pic>
         <p:nvPicPr>
-          <p:cNvPr id="5" name="Picture 4">
+          <p:cNvPr id="4" name="Picture 3">
             <a:extLst>
               <a:ext uri="{FF2B5EF4-FFF2-40B4-BE49-F238E27FC236}">
-                <a16:creationId xmlns:a16="http://schemas.microsoft.com/office/drawing/2014/main" id="{21F6C098-EB7F-4DD0-8737-AF725E6DF3C0}"/>
+                <a16:creationId xmlns:a16="http://schemas.microsoft.com/office/drawing/2014/main" id="{C37742E2-A1B0-E9F8-0BCE-472084C8686F}"/>
               </a:ext>
             </a:extLst>
           </p:cNvPr>
@@ -9162,22 +9639,12 @@
         </p:blipFill>
         <p:spPr>
           <a:xfrm>
-            <a:off x="3485914" y="2251719"/>
-            <a:ext cx="5398825" cy="2320281"/>
+            <a:off x="3346450" y="2444749"/>
+            <a:ext cx="7103292" cy="2542749"/>
           </a:xfrm>
           <a:prstGeom prst="rect">
             <a:avLst/>
           </a:prstGeom>
-          <a:ln>
-            <a:noFill/>
-          </a:ln>
-          <a:effectLst>
-            <a:outerShdw blurRad="292100" dist="139700" dir="2700000" algn="tl" rotWithShape="0">
-              <a:srgbClr val="333333">
-                <a:alpha val="65000"/>
-              </a:srgbClr>
-            </a:outerShdw>
-          </a:effectLst>
         </p:spPr>
       </p:pic>
       <p:sp>
@@ -9218,8 +9685,8 @@
         </p:nvCxnSpPr>
         <p:spPr>
           <a:xfrm flipV="1">
-            <a:off x="2922438" y="3107003"/>
-            <a:ext cx="1015855" cy="597572"/>
+            <a:off x="2922438" y="3424456"/>
+            <a:ext cx="2312838" cy="280119"/>
           </a:xfrm>
           <a:prstGeom prst="straightConnector1">
             <a:avLst/>
@@ -9248,14 +9715,13 @@
           <p:cNvPr id="11" name="Straight Arrow Connector 10"/>
           <p:cNvCxnSpPr>
             <a:cxnSpLocks/>
-            <a:stCxn id="16" idx="3"/>
           </p:cNvCxnSpPr>
           <p:nvPr/>
         </p:nvCxnSpPr>
         <p:spPr>
           <a:xfrm flipV="1">
-            <a:off x="3352800" y="3839955"/>
-            <a:ext cx="1148621" cy="1147544"/>
+            <a:off x="3449488" y="4160000"/>
+            <a:ext cx="1608416" cy="1058331"/>
           </a:xfrm>
           <a:prstGeom prst="straightConnector1">
             <a:avLst/>
@@ -9291,7 +9757,7 @@
         <p:spPr>
           <a:xfrm>
             <a:off x="2819400" y="2499005"/>
-            <a:ext cx="1219200" cy="218705"/>
+            <a:ext cx="1524000" cy="509952"/>
           </a:xfrm>
           <a:prstGeom prst="straightConnector1">
             <a:avLst/>
@@ -9510,10 +9976,10 @@
       </p:sp>
       <p:pic>
         <p:nvPicPr>
-          <p:cNvPr id="19" name="Picture 18">
+          <p:cNvPr id="3" name="Picture 2">
             <a:extLst>
               <a:ext uri="{FF2B5EF4-FFF2-40B4-BE49-F238E27FC236}">
-                <a16:creationId xmlns:a16="http://schemas.microsoft.com/office/drawing/2014/main" id="{B46C2BD4-779D-4733-8BA3-D6FCDA0C4387}"/>
+                <a16:creationId xmlns:a16="http://schemas.microsoft.com/office/drawing/2014/main" id="{85ED82A6-2BB3-201C-48CF-4A510AF8037E}"/>
               </a:ext>
             </a:extLst>
           </p:cNvPr>
@@ -9530,24 +9996,60 @@
         </p:blipFill>
         <p:spPr>
           <a:xfrm>
-            <a:off x="8077200" y="3704574"/>
-            <a:ext cx="3724795" cy="3010320"/>
+            <a:off x="9625012" y="3796795"/>
+            <a:ext cx="2590800" cy="2895600"/>
           </a:xfrm>
           <a:prstGeom prst="rect">
             <a:avLst/>
           </a:prstGeom>
-          <a:ln>
-            <a:noFill/>
-          </a:ln>
-          <a:effectLst>
-            <a:outerShdw blurRad="292100" dist="139700" dir="2700000" algn="tl" rotWithShape="0">
-              <a:srgbClr val="333333">
-                <a:alpha val="65000"/>
-              </a:srgbClr>
-            </a:outerShdw>
-          </a:effectLst>
         </p:spPr>
       </p:pic>
+      <p:sp>
+        <p:nvSpPr>
+          <p:cNvPr id="10" name="Right Arrow 9">
+            <a:extLst>
+              <a:ext uri="{FF2B5EF4-FFF2-40B4-BE49-F238E27FC236}">
+                <a16:creationId xmlns:a16="http://schemas.microsoft.com/office/drawing/2014/main" id="{7F090187-253B-C784-1802-806E555107FA}"/>
+              </a:ext>
+            </a:extLst>
+          </p:cNvPr>
+          <p:cNvSpPr/>
+          <p:nvPr/>
+        </p:nvSpPr>
+        <p:spPr>
+          <a:xfrm rot="3360119">
+            <a:off x="9924255" y="2990361"/>
+            <a:ext cx="1395412" cy="395069"/>
+          </a:xfrm>
+          <a:prstGeom prst="rightArrow">
+            <a:avLst/>
+          </a:prstGeom>
+        </p:spPr>
+        <p:style>
+          <a:lnRef idx="2">
+            <a:schemeClr val="accent1">
+              <a:shade val="15000"/>
+            </a:schemeClr>
+          </a:lnRef>
+          <a:fillRef idx="1">
+            <a:schemeClr val="accent1"/>
+          </a:fillRef>
+          <a:effectRef idx="0">
+            <a:schemeClr val="accent1"/>
+          </a:effectRef>
+          <a:fontRef idx="minor">
+            <a:schemeClr val="lt1"/>
+          </a:fontRef>
+        </p:style>
+        <p:txBody>
+          <a:bodyPr rtlCol="0" anchor="ctr"/>
+          <a:lstStyle/>
+          <a:p>
+            <a:pPr algn="ctr"/>
+            <a:endParaRPr lang="en-US"/>
+          </a:p>
+        </p:txBody>
+      </p:sp>
     </p:spTree>
     <p:extLst>
       <p:ext uri="{BB962C8B-B14F-4D97-AF65-F5344CB8AC3E}">
@@ -10158,53 +10660,12 @@
           <a:chExt cx="0" cy="0"/>
         </a:xfrm>
       </p:grpSpPr>
-      <p:sp>
-        <p:nvSpPr>
-          <p:cNvPr id="2" name="Title 1"/>
-          <p:cNvSpPr>
-            <a:spLocks noGrp="1"/>
-          </p:cNvSpPr>
-          <p:nvPr>
-            <p:ph type="title"/>
-          </p:nvPr>
-        </p:nvSpPr>
-        <p:spPr>
-          <a:xfrm>
-            <a:off x="2133600" y="304800"/>
-            <a:ext cx="8229600" cy="1143000"/>
-          </a:xfrm>
-        </p:spPr>
-        <p:txBody>
-          <a:bodyPr>
-            <a:normAutofit fontScale="90000"/>
-          </a:bodyPr>
-          <a:lstStyle/>
-          <a:p>
-            <a:r>
-              <a:rPr lang="en-GB" dirty="0"/>
-              <a:t>Recap - Counter-Controlled </a:t>
-            </a:r>
-            <a:r>
-              <a:rPr lang="en-GB" dirty="0">
-                <a:solidFill>
-                  <a:srgbClr val="FF0000"/>
-                </a:solidFill>
-              </a:rPr>
-              <a:t>for </a:t>
-            </a:r>
-            <a:r>
-              <a:rPr lang="en-GB" dirty="0"/>
-              <a:t>Loop</a:t>
-            </a:r>
-          </a:p>
-        </p:txBody>
-      </p:sp>
       <p:pic>
         <p:nvPicPr>
-          <p:cNvPr id="10" name="Picture 9">
+          <p:cNvPr id="4" name="Picture 3">
             <a:extLst>
               <a:ext uri="{FF2B5EF4-FFF2-40B4-BE49-F238E27FC236}">
-                <a16:creationId xmlns:a16="http://schemas.microsoft.com/office/drawing/2014/main" id="{71FB5FA5-9D79-4121-9AB8-C2224D7CB92B}"/>
+                <a16:creationId xmlns:a16="http://schemas.microsoft.com/office/drawing/2014/main" id="{6035284D-21C3-3343-F053-ACB4F95290FC}"/>
               </a:ext>
             </a:extLst>
           </p:cNvPr>
@@ -10214,32 +10675,141 @@
           <p:nvPr/>
         </p:nvPicPr>
         <p:blipFill>
-          <a:blip r:embed="rId2">
-            <a:extLst>
-              <a:ext uri="{28A0092B-C50C-407E-A947-70E740481C1C}">
-                <a14:useLocalDpi xmlns:a14="http://schemas.microsoft.com/office/drawing/2010/main" val="0"/>
-              </a:ext>
-            </a:extLst>
-          </a:blip>
+          <a:blip r:embed="rId2"/>
           <a:stretch>
             <a:fillRect/>
           </a:stretch>
         </p:blipFill>
         <p:spPr>
           <a:xfrm>
-            <a:off x="1293767" y="1905000"/>
-            <a:ext cx="9604466" cy="4191001"/>
+            <a:off x="152399" y="1490134"/>
+            <a:ext cx="8065127" cy="3462866"/>
           </a:xfrm>
           <a:prstGeom prst="rect">
             <a:avLst/>
           </a:prstGeom>
-          <a:ln>
-            <a:solidFill>
-              <a:schemeClr val="tx1"/>
-            </a:solidFill>
-          </a:ln>
         </p:spPr>
       </p:pic>
+      <p:sp>
+        <p:nvSpPr>
+          <p:cNvPr id="2" name="Title 1"/>
+          <p:cNvSpPr>
+            <a:spLocks noGrp="1"/>
+          </p:cNvSpPr>
+          <p:nvPr>
+            <p:ph type="title"/>
+          </p:nvPr>
+        </p:nvSpPr>
+        <p:spPr>
+          <a:xfrm>
+            <a:off x="2133600" y="304800"/>
+            <a:ext cx="8229600" cy="1143000"/>
+          </a:xfrm>
+        </p:spPr>
+        <p:txBody>
+          <a:bodyPr>
+            <a:normAutofit fontScale="90000"/>
+          </a:bodyPr>
+          <a:lstStyle/>
+          <a:p>
+            <a:r>
+              <a:rPr lang="en-GB" dirty="0"/>
+              <a:t>Recap - Counter-Controlled </a:t>
+            </a:r>
+            <a:r>
+              <a:rPr lang="en-GB" dirty="0">
+                <a:solidFill>
+                  <a:srgbClr val="FF0000"/>
+                </a:solidFill>
+              </a:rPr>
+              <a:t>for </a:t>
+            </a:r>
+            <a:r>
+              <a:rPr lang="en-GB" dirty="0"/>
+              <a:t>Loop</a:t>
+            </a:r>
+          </a:p>
+        </p:txBody>
+      </p:sp>
+      <p:pic>
+        <p:nvPicPr>
+          <p:cNvPr id="3" name="Picture 2">
+            <a:extLst>
+              <a:ext uri="{FF2B5EF4-FFF2-40B4-BE49-F238E27FC236}">
+                <a16:creationId xmlns:a16="http://schemas.microsoft.com/office/drawing/2014/main" id="{72DA4ABD-1101-9E19-92E0-7E5BCDA48543}"/>
+              </a:ext>
+            </a:extLst>
+          </p:cNvPr>
+          <p:cNvPicPr>
+            <a:picLocks noChangeAspect="1"/>
+          </p:cNvPicPr>
+          <p:nvPr/>
+        </p:nvPicPr>
+        <p:blipFill>
+          <a:blip r:embed="rId3"/>
+          <a:stretch>
+            <a:fillRect/>
+          </a:stretch>
+        </p:blipFill>
+        <p:spPr>
+          <a:xfrm>
+            <a:off x="6627283" y="1538732"/>
+            <a:ext cx="5676900" cy="2159000"/>
+          </a:xfrm>
+          <a:prstGeom prst="rect">
+            <a:avLst/>
+          </a:prstGeom>
+        </p:spPr>
+      </p:pic>
+      <p:sp>
+        <p:nvSpPr>
+          <p:cNvPr id="5" name="Right Arrow 4">
+            <a:extLst>
+              <a:ext uri="{FF2B5EF4-FFF2-40B4-BE49-F238E27FC236}">
+                <a16:creationId xmlns:a16="http://schemas.microsoft.com/office/drawing/2014/main" id="{35123B3B-D197-E9C9-EAFB-0DEB4DD122B2}"/>
+              </a:ext>
+            </a:extLst>
+          </p:cNvPr>
+          <p:cNvSpPr/>
+          <p:nvPr/>
+        </p:nvSpPr>
+        <p:spPr>
+          <a:xfrm>
+            <a:off x="5606796" y="2184400"/>
+            <a:ext cx="978408" cy="408432"/>
+          </a:xfrm>
+          <a:prstGeom prst="rightArrow">
+            <a:avLst>
+              <a:gd name="adj1" fmla="val 43012"/>
+              <a:gd name="adj2" fmla="val 50000"/>
+            </a:avLst>
+          </a:prstGeom>
+        </p:spPr>
+        <p:style>
+          <a:lnRef idx="2">
+            <a:schemeClr val="accent1">
+              <a:shade val="15000"/>
+            </a:schemeClr>
+          </a:lnRef>
+          <a:fillRef idx="1">
+            <a:schemeClr val="accent1"/>
+          </a:fillRef>
+          <a:effectRef idx="0">
+            <a:schemeClr val="accent1"/>
+          </a:effectRef>
+          <a:fontRef idx="minor">
+            <a:schemeClr val="lt1"/>
+          </a:fontRef>
+        </p:style>
+        <p:txBody>
+          <a:bodyPr rtlCol="0" anchor="ctr"/>
+          <a:lstStyle/>
+          <a:p>
+            <a:pPr algn="ctr"/>
+            <a:endParaRPr lang="en-US"/>
+          </a:p>
+        </p:txBody>
+      </p:sp>
     </p:spTree>
     <p:extLst>
       <p:ext uri="{BB962C8B-B14F-4D97-AF65-F5344CB8AC3E}">
@@ -10250,6 +10820,173 @@
   <p:clrMapOvr>
     <a:masterClrMapping/>
   </p:clrMapOvr>
+  <p:timing>
+    <p:tnLst>
+      <p:par>
+        <p:cTn id="1" dur="indefinite" restart="never" nodeType="tmRoot">
+          <p:childTnLst>
+            <p:seq concurrent="1" nextAc="seek">
+              <p:cTn id="2" dur="indefinite" nodeType="mainSeq">
+                <p:childTnLst>
+                  <p:par>
+                    <p:cTn id="3" fill="hold">
+                      <p:stCondLst>
+                        <p:cond delay="indefinite"/>
+                      </p:stCondLst>
+                      <p:childTnLst>
+                        <p:par>
+                          <p:cTn id="4" fill="hold">
+                            <p:stCondLst>
+                              <p:cond delay="0"/>
+                            </p:stCondLst>
+                            <p:childTnLst>
+                              <p:par>
+                                <p:cTn id="5" presetID="12" presetClass="entr" presetSubtype="4" fill="hold" grpId="0" nodeType="clickEffect">
+                                  <p:stCondLst>
+                                    <p:cond delay="0"/>
+                                  </p:stCondLst>
+                                  <p:childTnLst>
+                                    <p:set>
+                                      <p:cBhvr>
+                                        <p:cTn id="6" dur="1" fill="hold">
+                                          <p:stCondLst>
+                                            <p:cond delay="0"/>
+                                          </p:stCondLst>
+                                        </p:cTn>
+                                        <p:tgtEl>
+                                          <p:spTgt spid="5"/>
+                                        </p:tgtEl>
+                                        <p:attrNameLst>
+                                          <p:attrName>style.visibility</p:attrName>
+                                        </p:attrNameLst>
+                                      </p:cBhvr>
+                                      <p:to>
+                                        <p:strVal val="visible"/>
+                                      </p:to>
+                                    </p:set>
+                                    <p:anim calcmode="lin" valueType="num">
+                                      <p:cBhvr additive="base">
+                                        <p:cTn id="7" dur="500"/>
+                                        <p:tgtEl>
+                                          <p:spTgt spid="5"/>
+                                        </p:tgtEl>
+                                        <p:attrNameLst>
+                                          <p:attrName>ppt_y</p:attrName>
+                                        </p:attrNameLst>
+                                      </p:cBhvr>
+                                      <p:tavLst>
+                                        <p:tav tm="0">
+                                          <p:val>
+                                            <p:strVal val="#ppt_y+#ppt_h*1.125000"/>
+                                          </p:val>
+                                        </p:tav>
+                                        <p:tav tm="100000">
+                                          <p:val>
+                                            <p:strVal val="#ppt_y"/>
+                                          </p:val>
+                                        </p:tav>
+                                      </p:tavLst>
+                                    </p:anim>
+                                    <p:animEffect transition="in" filter="wipe(up)">
+                                      <p:cBhvr>
+                                        <p:cTn id="8" dur="500"/>
+                                        <p:tgtEl>
+                                          <p:spTgt spid="5"/>
+                                        </p:tgtEl>
+                                      </p:cBhvr>
+                                    </p:animEffect>
+                                  </p:childTnLst>
+                                </p:cTn>
+                              </p:par>
+                              <p:par>
+                                <p:cTn id="9" presetID="12" presetClass="entr" presetSubtype="4" fill="hold" nodeType="withEffect">
+                                  <p:stCondLst>
+                                    <p:cond delay="0"/>
+                                  </p:stCondLst>
+                                  <p:childTnLst>
+                                    <p:set>
+                                      <p:cBhvr>
+                                        <p:cTn id="10" dur="1" fill="hold">
+                                          <p:stCondLst>
+                                            <p:cond delay="0"/>
+                                          </p:stCondLst>
+                                        </p:cTn>
+                                        <p:tgtEl>
+                                          <p:spTgt spid="3"/>
+                                        </p:tgtEl>
+                                        <p:attrNameLst>
+                                          <p:attrName>style.visibility</p:attrName>
+                                        </p:attrNameLst>
+                                      </p:cBhvr>
+                                      <p:to>
+                                        <p:strVal val="visible"/>
+                                      </p:to>
+                                    </p:set>
+                                    <p:anim calcmode="lin" valueType="num">
+                                      <p:cBhvr additive="base">
+                                        <p:cTn id="11" dur="500"/>
+                                        <p:tgtEl>
+                                          <p:spTgt spid="3"/>
+                                        </p:tgtEl>
+                                        <p:attrNameLst>
+                                          <p:attrName>ppt_y</p:attrName>
+                                        </p:attrNameLst>
+                                      </p:cBhvr>
+                                      <p:tavLst>
+                                        <p:tav tm="0">
+                                          <p:val>
+                                            <p:strVal val="#ppt_y+#ppt_h*1.125000"/>
+                                          </p:val>
+                                        </p:tav>
+                                        <p:tav tm="100000">
+                                          <p:val>
+                                            <p:strVal val="#ppt_y"/>
+                                          </p:val>
+                                        </p:tav>
+                                      </p:tavLst>
+                                    </p:anim>
+                                    <p:animEffect transition="in" filter="wipe(up)">
+                                      <p:cBhvr>
+                                        <p:cTn id="12" dur="500"/>
+                                        <p:tgtEl>
+                                          <p:spTgt spid="3"/>
+                                        </p:tgtEl>
+                                      </p:cBhvr>
+                                    </p:animEffect>
+                                  </p:childTnLst>
+                                </p:cTn>
+                              </p:par>
+                            </p:childTnLst>
+                          </p:cTn>
+                        </p:par>
+                      </p:childTnLst>
+                    </p:cTn>
+                  </p:par>
+                </p:childTnLst>
+              </p:cTn>
+              <p:prevCondLst>
+                <p:cond evt="onPrev" delay="0">
+                  <p:tgtEl>
+                    <p:sldTgt/>
+                  </p:tgtEl>
+                </p:cond>
+              </p:prevCondLst>
+              <p:nextCondLst>
+                <p:cond evt="onNext" delay="0">
+                  <p:tgtEl>
+                    <p:sldTgt/>
+                  </p:tgtEl>
+                </p:cond>
+              </p:nextCondLst>
+            </p:seq>
+          </p:childTnLst>
+        </p:cTn>
+      </p:par>
+    </p:tnLst>
+    <p:bldLst>
+      <p:bldP spid="5" grpId="0" animBg="1"/>
+    </p:bldLst>
+  </p:timing>
 </p:sld>
 </file>
 
@@ -10381,40 +11118,6 @@
           <a:chExt cx="0" cy="0"/>
         </a:xfrm>
       </p:grpSpPr>
-      <p:pic>
-        <p:nvPicPr>
-          <p:cNvPr id="2" name="Picture 1"/>
-          <p:cNvPicPr>
-            <a:picLocks noChangeAspect="1"/>
-          </p:cNvPicPr>
-          <p:nvPr/>
-        </p:nvPicPr>
-        <p:blipFill rotWithShape="1">
-          <a:blip r:embed="rId2">
-            <a:extLst>
-              <a:ext uri="{28A0092B-C50C-407E-A947-70E740481C1C}">
-                <a14:useLocalDpi xmlns:a14="http://schemas.microsoft.com/office/drawing/2010/main" val="0"/>
-              </a:ext>
-            </a:extLst>
-          </a:blip>
-          <a:srcRect r="12049"/>
-          <a:stretch/>
-        </p:blipFill>
-        <p:spPr>
-          <a:xfrm>
-            <a:off x="2362200" y="1600200"/>
-            <a:ext cx="9351846" cy="4983162"/>
-          </a:xfrm>
-          <a:prstGeom prst="rect">
-            <a:avLst/>
-          </a:prstGeom>
-          <a:ln>
-            <a:solidFill>
-              <a:schemeClr val="tx1"/>
-            </a:solidFill>
-          </a:ln>
-        </p:spPr>
-      </p:pic>
       <p:sp>
         <p:nvSpPr>
           <p:cNvPr id="6" name="Title 1">
@@ -10431,7 +11134,12 @@
             <p:ph type="title"/>
           </p:nvPr>
         </p:nvSpPr>
-        <p:spPr/>
+        <p:spPr>
+          <a:xfrm>
+            <a:off x="228600" y="43230"/>
+            <a:ext cx="10972800" cy="1143000"/>
+          </a:xfrm>
+        </p:spPr>
         <p:txBody>
           <a:bodyPr>
             <a:normAutofit/>
@@ -10465,7 +11173,7 @@
         </p:nvSpPr>
         <p:spPr>
           <a:xfrm>
-            <a:off x="228600" y="3167390"/>
+            <a:off x="257175" y="2141672"/>
             <a:ext cx="2514600" cy="1815882"/>
           </a:xfrm>
           <a:prstGeom prst="rect">
@@ -10509,6 +11217,112 @@
           </a:p>
         </p:txBody>
       </p:sp>
+      <p:pic>
+        <p:nvPicPr>
+          <p:cNvPr id="5" name="Picture 4">
+            <a:extLst>
+              <a:ext uri="{FF2B5EF4-FFF2-40B4-BE49-F238E27FC236}">
+                <a16:creationId xmlns:a16="http://schemas.microsoft.com/office/drawing/2014/main" id="{BA3A5A71-BC06-ED36-7678-E64CA8387DB4}"/>
+              </a:ext>
+            </a:extLst>
+          </p:cNvPr>
+          <p:cNvPicPr>
+            <a:picLocks noChangeAspect="1"/>
+          </p:cNvPicPr>
+          <p:nvPr/>
+        </p:nvPicPr>
+        <p:blipFill>
+          <a:blip r:embed="rId2"/>
+          <a:stretch>
+            <a:fillRect/>
+          </a:stretch>
+        </p:blipFill>
+        <p:spPr>
+          <a:xfrm>
+            <a:off x="3343275" y="1186230"/>
+            <a:ext cx="7772400" cy="3726766"/>
+          </a:xfrm>
+          <a:prstGeom prst="rect">
+            <a:avLst/>
+          </a:prstGeom>
+        </p:spPr>
+      </p:pic>
+      <p:pic>
+        <p:nvPicPr>
+          <p:cNvPr id="7" name="Picture 6">
+            <a:extLst>
+              <a:ext uri="{FF2B5EF4-FFF2-40B4-BE49-F238E27FC236}">
+                <a16:creationId xmlns:a16="http://schemas.microsoft.com/office/drawing/2014/main" id="{D648044A-F0E4-B74F-AA9A-F0D5DA782A85}"/>
+              </a:ext>
+            </a:extLst>
+          </p:cNvPr>
+          <p:cNvPicPr>
+            <a:picLocks noChangeAspect="1"/>
+          </p:cNvPicPr>
+          <p:nvPr/>
+        </p:nvPicPr>
+        <p:blipFill>
+          <a:blip r:embed="rId3"/>
+          <a:stretch>
+            <a:fillRect/>
+          </a:stretch>
+        </p:blipFill>
+        <p:spPr>
+          <a:xfrm>
+            <a:off x="5788305" y="5181600"/>
+            <a:ext cx="4705070" cy="1488842"/>
+          </a:xfrm>
+          <a:prstGeom prst="rect">
+            <a:avLst/>
+          </a:prstGeom>
+        </p:spPr>
+      </p:pic>
+      <p:sp>
+        <p:nvSpPr>
+          <p:cNvPr id="8" name="Right Arrow 7">
+            <a:extLst>
+              <a:ext uri="{FF2B5EF4-FFF2-40B4-BE49-F238E27FC236}">
+                <a16:creationId xmlns:a16="http://schemas.microsoft.com/office/drawing/2014/main" id="{A7D2731B-C172-8096-992A-9D8F279EB026}"/>
+              </a:ext>
+            </a:extLst>
+          </p:cNvPr>
+          <p:cNvSpPr/>
+          <p:nvPr/>
+        </p:nvSpPr>
+        <p:spPr>
+          <a:xfrm rot="2297744">
+            <a:off x="5700260" y="4581942"/>
+            <a:ext cx="978408" cy="332232"/>
+          </a:xfrm>
+          <a:prstGeom prst="rightArrow">
+            <a:avLst/>
+          </a:prstGeom>
+        </p:spPr>
+        <p:style>
+          <a:lnRef idx="2">
+            <a:schemeClr val="accent1">
+              <a:shade val="15000"/>
+            </a:schemeClr>
+          </a:lnRef>
+          <a:fillRef idx="1">
+            <a:schemeClr val="accent1"/>
+          </a:fillRef>
+          <a:effectRef idx="0">
+            <a:schemeClr val="accent1"/>
+          </a:effectRef>
+          <a:fontRef idx="minor">
+            <a:schemeClr val="lt1"/>
+          </a:fontRef>
+        </p:style>
+        <p:txBody>
+          <a:bodyPr rtlCol="0" anchor="ctr"/>
+          <a:lstStyle/>
+          <a:p>
+            <a:pPr algn="ctr"/>
+            <a:endParaRPr lang="en-US"/>
+          </a:p>
+        </p:txBody>
+      </p:sp>
     </p:spTree>
     <p:extLst>
       <p:ext uri="{BB962C8B-B14F-4D97-AF65-F5344CB8AC3E}">
@@ -10519,6 +11333,203 @@
   <p:clrMapOvr>
     <a:masterClrMapping/>
   </p:clrMapOvr>
+  <p:timing>
+    <p:tnLst>
+      <p:par>
+        <p:cTn id="1" dur="indefinite" restart="never" nodeType="tmRoot">
+          <p:childTnLst>
+            <p:seq concurrent="1" nextAc="seek">
+              <p:cTn id="2" dur="indefinite" nodeType="mainSeq">
+                <p:childTnLst>
+                  <p:par>
+                    <p:cTn id="3" fill="hold">
+                      <p:stCondLst>
+                        <p:cond delay="indefinite"/>
+                      </p:stCondLst>
+                      <p:childTnLst>
+                        <p:par>
+                          <p:cTn id="4" fill="hold">
+                            <p:stCondLst>
+                              <p:cond delay="0"/>
+                            </p:stCondLst>
+                            <p:childTnLst>
+                              <p:par>
+                                <p:cTn id="5" presetID="2" presetClass="entr" presetSubtype="4" fill="hold" grpId="0" nodeType="clickEffect">
+                                  <p:stCondLst>
+                                    <p:cond delay="0"/>
+                                  </p:stCondLst>
+                                  <p:childTnLst>
+                                    <p:set>
+                                      <p:cBhvr>
+                                        <p:cTn id="6" dur="1" fill="hold">
+                                          <p:stCondLst>
+                                            <p:cond delay="0"/>
+                                          </p:stCondLst>
+                                        </p:cTn>
+                                        <p:tgtEl>
+                                          <p:spTgt spid="8"/>
+                                        </p:tgtEl>
+                                        <p:attrNameLst>
+                                          <p:attrName>style.visibility</p:attrName>
+                                        </p:attrNameLst>
+                                      </p:cBhvr>
+                                      <p:to>
+                                        <p:strVal val="visible"/>
+                                      </p:to>
+                                    </p:set>
+                                    <p:anim calcmode="lin" valueType="num">
+                                      <p:cBhvr additive="base">
+                                        <p:cTn id="7" dur="500" fill="hold"/>
+                                        <p:tgtEl>
+                                          <p:spTgt spid="8"/>
+                                        </p:tgtEl>
+                                        <p:attrNameLst>
+                                          <p:attrName>ppt_x</p:attrName>
+                                        </p:attrNameLst>
+                                      </p:cBhvr>
+                                      <p:tavLst>
+                                        <p:tav tm="0">
+                                          <p:val>
+                                            <p:strVal val="#ppt_x"/>
+                                          </p:val>
+                                        </p:tav>
+                                        <p:tav tm="100000">
+                                          <p:val>
+                                            <p:strVal val="#ppt_x"/>
+                                          </p:val>
+                                        </p:tav>
+                                      </p:tavLst>
+                                    </p:anim>
+                                    <p:anim calcmode="lin" valueType="num">
+                                      <p:cBhvr additive="base">
+                                        <p:cTn id="8" dur="500" fill="hold"/>
+                                        <p:tgtEl>
+                                          <p:spTgt spid="8"/>
+                                        </p:tgtEl>
+                                        <p:attrNameLst>
+                                          <p:attrName>ppt_y</p:attrName>
+                                        </p:attrNameLst>
+                                      </p:cBhvr>
+                                      <p:tavLst>
+                                        <p:tav tm="0">
+                                          <p:val>
+                                            <p:strVal val="1+#ppt_h/2"/>
+                                          </p:val>
+                                        </p:tav>
+                                        <p:tav tm="100000">
+                                          <p:val>
+                                            <p:strVal val="#ppt_y"/>
+                                          </p:val>
+                                        </p:tav>
+                                      </p:tavLst>
+                                    </p:anim>
+                                  </p:childTnLst>
+                                </p:cTn>
+                              </p:par>
+                              <p:par>
+                                <p:cTn id="9" presetID="2" presetClass="entr" presetSubtype="4" fill="hold" nodeType="withEffect">
+                                  <p:stCondLst>
+                                    <p:cond delay="0"/>
+                                  </p:stCondLst>
+                                  <p:childTnLst>
+                                    <p:set>
+                                      <p:cBhvr>
+                                        <p:cTn id="10" dur="1" fill="hold">
+                                          <p:stCondLst>
+                                            <p:cond delay="0"/>
+                                          </p:stCondLst>
+                                        </p:cTn>
+                                        <p:tgtEl>
+                                          <p:spTgt spid="7"/>
+                                        </p:tgtEl>
+                                        <p:attrNameLst>
+                                          <p:attrName>style.visibility</p:attrName>
+                                        </p:attrNameLst>
+                                      </p:cBhvr>
+                                      <p:to>
+                                        <p:strVal val="visible"/>
+                                      </p:to>
+                                    </p:set>
+                                    <p:anim calcmode="lin" valueType="num">
+                                      <p:cBhvr additive="base">
+                                        <p:cTn id="11" dur="500" fill="hold"/>
+                                        <p:tgtEl>
+                                          <p:spTgt spid="7"/>
+                                        </p:tgtEl>
+                                        <p:attrNameLst>
+                                          <p:attrName>ppt_x</p:attrName>
+                                        </p:attrNameLst>
+                                      </p:cBhvr>
+                                      <p:tavLst>
+                                        <p:tav tm="0">
+                                          <p:val>
+                                            <p:strVal val="#ppt_x"/>
+                                          </p:val>
+                                        </p:tav>
+                                        <p:tav tm="100000">
+                                          <p:val>
+                                            <p:strVal val="#ppt_x"/>
+                                          </p:val>
+                                        </p:tav>
+                                      </p:tavLst>
+                                    </p:anim>
+                                    <p:anim calcmode="lin" valueType="num">
+                                      <p:cBhvr additive="base">
+                                        <p:cTn id="12" dur="500" fill="hold"/>
+                                        <p:tgtEl>
+                                          <p:spTgt spid="7"/>
+                                        </p:tgtEl>
+                                        <p:attrNameLst>
+                                          <p:attrName>ppt_y</p:attrName>
+                                        </p:attrNameLst>
+                                      </p:cBhvr>
+                                      <p:tavLst>
+                                        <p:tav tm="0">
+                                          <p:val>
+                                            <p:strVal val="1+#ppt_h/2"/>
+                                          </p:val>
+                                        </p:tav>
+                                        <p:tav tm="100000">
+                                          <p:val>
+                                            <p:strVal val="#ppt_y"/>
+                                          </p:val>
+                                        </p:tav>
+                                      </p:tavLst>
+                                    </p:anim>
+                                  </p:childTnLst>
+                                </p:cTn>
+                              </p:par>
+                            </p:childTnLst>
+                          </p:cTn>
+                        </p:par>
+                      </p:childTnLst>
+                    </p:cTn>
+                  </p:par>
+                </p:childTnLst>
+              </p:cTn>
+              <p:prevCondLst>
+                <p:cond evt="onPrev" delay="0">
+                  <p:tgtEl>
+                    <p:sldTgt/>
+                  </p:tgtEl>
+                </p:cond>
+              </p:prevCondLst>
+              <p:nextCondLst>
+                <p:cond evt="onNext" delay="0">
+                  <p:tgtEl>
+                    <p:sldTgt/>
+                  </p:tgtEl>
+                </p:cond>
+              </p:nextCondLst>
+            </p:seq>
+          </p:childTnLst>
+        </p:cTn>
+      </p:par>
+    </p:tnLst>
+    <p:bldLst>
+      <p:bldP spid="8" grpId="0" animBg="1"/>
+    </p:bldLst>
+  </p:timing>
 </p:sld>
 </file>
 
